--- a/ゲーム科2年/00_前期/ゲーム開発Ⅰ/Blender/03_カットと押し出し.pptx
+++ b/ゲーム科2年/00_前期/ゲーム開発Ⅰ/Blender/03_カットと押し出し.pptx
@@ -7,15 +7,14 @@
   <p:sldIdLst>
     <p:sldId id="258" r:id="rId2"/>
     <p:sldId id="259" r:id="rId3"/>
-    <p:sldId id="260" r:id="rId4"/>
-    <p:sldId id="261" r:id="rId5"/>
-    <p:sldId id="262" r:id="rId6"/>
-    <p:sldId id="263" r:id="rId7"/>
-    <p:sldId id="264" r:id="rId8"/>
-    <p:sldId id="265" r:id="rId9"/>
-    <p:sldId id="266" r:id="rId10"/>
-    <p:sldId id="267" r:id="rId11"/>
-    <p:sldId id="268" r:id="rId12"/>
+    <p:sldId id="261" r:id="rId4"/>
+    <p:sldId id="262" r:id="rId5"/>
+    <p:sldId id="263" r:id="rId6"/>
+    <p:sldId id="264" r:id="rId7"/>
+    <p:sldId id="265" r:id="rId8"/>
+    <p:sldId id="266" r:id="rId9"/>
+    <p:sldId id="267" r:id="rId10"/>
+    <p:sldId id="268" r:id="rId11"/>
   </p:sldIdLst>
   <p:sldSz cx="12192000" cy="6858000"/>
   <p:notesSz cx="6858000" cy="9144000"/>
@@ -269,7 +268,7 @@
           <a:p>
             <a:fld id="{E9CC885B-4903-4D54-9A93-00025F12DED9}" type="datetimeFigureOut">
               <a:rPr kumimoji="1" lang="ja-JP" altLang="en-US" smtClean="0"/>
-              <a:t>2025/2/2</a:t>
+              <a:t>2026/5/13</a:t>
             </a:fld>
             <a:endParaRPr kumimoji="1" lang="ja-JP" altLang="en-US"/>
           </a:p>
@@ -499,7 +498,7 @@
           <a:p>
             <a:fld id="{E9CC885B-4903-4D54-9A93-00025F12DED9}" type="datetimeFigureOut">
               <a:rPr kumimoji="1" lang="ja-JP" altLang="en-US" smtClean="0"/>
-              <a:t>2025/2/2</a:t>
+              <a:t>2026/5/13</a:t>
             </a:fld>
             <a:endParaRPr kumimoji="1" lang="ja-JP" altLang="en-US"/>
           </a:p>
@@ -739,7 +738,7 @@
           <a:p>
             <a:fld id="{E9CC885B-4903-4D54-9A93-00025F12DED9}" type="datetimeFigureOut">
               <a:rPr kumimoji="1" lang="ja-JP" altLang="en-US" smtClean="0"/>
-              <a:t>2025/2/2</a:t>
+              <a:t>2026/5/13</a:t>
             </a:fld>
             <a:endParaRPr kumimoji="1" lang="ja-JP" altLang="en-US"/>
           </a:p>
@@ -969,7 +968,7 @@
           <a:p>
             <a:fld id="{E9CC885B-4903-4D54-9A93-00025F12DED9}" type="datetimeFigureOut">
               <a:rPr kumimoji="1" lang="ja-JP" altLang="en-US" smtClean="0"/>
-              <a:t>2025/2/2</a:t>
+              <a:t>2026/5/13</a:t>
             </a:fld>
             <a:endParaRPr kumimoji="1" lang="ja-JP" altLang="en-US"/>
           </a:p>
@@ -1244,7 +1243,7 @@
           <a:p>
             <a:fld id="{E9CC885B-4903-4D54-9A93-00025F12DED9}" type="datetimeFigureOut">
               <a:rPr kumimoji="1" lang="ja-JP" altLang="en-US" smtClean="0"/>
-              <a:t>2025/2/2</a:t>
+              <a:t>2026/5/13</a:t>
             </a:fld>
             <a:endParaRPr kumimoji="1" lang="ja-JP" altLang="en-US"/>
           </a:p>
@@ -1573,7 +1572,7 @@
           <a:p>
             <a:fld id="{E9CC885B-4903-4D54-9A93-00025F12DED9}" type="datetimeFigureOut">
               <a:rPr kumimoji="1" lang="ja-JP" altLang="en-US" smtClean="0"/>
-              <a:t>2025/2/2</a:t>
+              <a:t>2026/5/13</a:t>
             </a:fld>
             <a:endParaRPr kumimoji="1" lang="ja-JP" altLang="en-US"/>
           </a:p>
@@ -2049,7 +2048,7 @@
           <a:p>
             <a:fld id="{E9CC885B-4903-4D54-9A93-00025F12DED9}" type="datetimeFigureOut">
               <a:rPr kumimoji="1" lang="ja-JP" altLang="en-US" smtClean="0"/>
-              <a:t>2025/2/2</a:t>
+              <a:t>2026/5/13</a:t>
             </a:fld>
             <a:endParaRPr kumimoji="1" lang="ja-JP" altLang="en-US"/>
           </a:p>
@@ -2190,7 +2189,7 @@
           <a:p>
             <a:fld id="{E9CC885B-4903-4D54-9A93-00025F12DED9}" type="datetimeFigureOut">
               <a:rPr kumimoji="1" lang="ja-JP" altLang="en-US" smtClean="0"/>
-              <a:t>2025/2/2</a:t>
+              <a:t>2026/5/13</a:t>
             </a:fld>
             <a:endParaRPr kumimoji="1" lang="ja-JP" altLang="en-US"/>
           </a:p>
@@ -2303,7 +2302,7 @@
           <a:p>
             <a:fld id="{E9CC885B-4903-4D54-9A93-00025F12DED9}" type="datetimeFigureOut">
               <a:rPr kumimoji="1" lang="ja-JP" altLang="en-US" smtClean="0"/>
-              <a:t>2025/2/2</a:t>
+              <a:t>2026/5/13</a:t>
             </a:fld>
             <a:endParaRPr kumimoji="1" lang="ja-JP" altLang="en-US"/>
           </a:p>
@@ -2646,7 +2645,7 @@
           <a:p>
             <a:fld id="{E9CC885B-4903-4D54-9A93-00025F12DED9}" type="datetimeFigureOut">
               <a:rPr kumimoji="1" lang="ja-JP" altLang="en-US" smtClean="0"/>
-              <a:t>2025/2/2</a:t>
+              <a:t>2026/5/13</a:t>
             </a:fld>
             <a:endParaRPr kumimoji="1" lang="ja-JP" altLang="en-US"/>
           </a:p>
@@ -2934,7 +2933,7 @@
           <a:p>
             <a:fld id="{E9CC885B-4903-4D54-9A93-00025F12DED9}" type="datetimeFigureOut">
               <a:rPr kumimoji="1" lang="ja-JP" altLang="en-US" smtClean="0"/>
-              <a:t>2025/2/2</a:t>
+              <a:t>2026/5/13</a:t>
             </a:fld>
             <a:endParaRPr kumimoji="1" lang="ja-JP" altLang="en-US"/>
           </a:p>
@@ -3207,7 +3206,7 @@
           <a:p>
             <a:fld id="{E9CC885B-4903-4D54-9A93-00025F12DED9}" type="datetimeFigureOut">
               <a:rPr kumimoji="1" lang="ja-JP" altLang="en-US" smtClean="0"/>
-              <a:t>2025/2/2</a:t>
+              <a:t>2026/5/13</a:t>
             </a:fld>
             <a:endParaRPr kumimoji="1" lang="ja-JP" altLang="en-US"/>
           </a:p>
@@ -3906,146 +3905,6 @@
         <p:spPr>
           <a:xfrm>
             <a:off x="567542" y="1216429"/>
-            <a:ext cx="9281708" cy="461665"/>
-          </a:xfrm>
-          <a:prstGeom prst="rect">
-            <a:avLst/>
-          </a:prstGeom>
-          <a:noFill/>
-        </p:spPr>
-        <p:txBody>
-          <a:bodyPr wrap="none" rtlCol="0">
-            <a:spAutoFit/>
-          </a:bodyPr>
-          <a:lstStyle/>
-          <a:p>
-            <a:r>
-              <a:rPr kumimoji="1" lang="ja-JP" altLang="en-US" sz="2400" dirty="0"/>
-              <a:t>この状態でクリックすると、半分の位置で</a:t>
-            </a:r>
-            <a:r>
-              <a:rPr kumimoji="1" lang="en-US" altLang="ja-JP" sz="2400" dirty="0"/>
-              <a:t>1</a:t>
-            </a:r>
-            <a:r>
-              <a:rPr kumimoji="1" lang="ja-JP" altLang="en-US" sz="2400" dirty="0"/>
-              <a:t>周分カットされます。</a:t>
-            </a:r>
-            <a:endParaRPr kumimoji="1" lang="en-US" altLang="ja-JP" sz="2400" dirty="0"/>
-          </a:p>
-        </p:txBody>
-      </p:sp>
-      <p:pic>
-        <p:nvPicPr>
-          <p:cNvPr id="5" name="図 4">
-            <a:extLst>
-              <a:ext uri="{FF2B5EF4-FFF2-40B4-BE49-F238E27FC236}">
-                <a16:creationId xmlns:a16="http://schemas.microsoft.com/office/drawing/2014/main" id="{8D07E54C-510A-414C-8B85-471398AF85E6}"/>
-              </a:ext>
-            </a:extLst>
-          </p:cNvPr>
-          <p:cNvPicPr>
-            <a:picLocks noChangeAspect="1"/>
-          </p:cNvPicPr>
-          <p:nvPr/>
-        </p:nvPicPr>
-        <p:blipFill>
-          <a:blip r:embed="rId2"/>
-          <a:stretch>
-            <a:fillRect/>
-          </a:stretch>
-        </p:blipFill>
-        <p:spPr>
-          <a:xfrm>
-            <a:off x="567542" y="1817795"/>
-            <a:ext cx="4668576" cy="4548252"/>
-          </a:xfrm>
-          <a:prstGeom prst="rect">
-            <a:avLst/>
-          </a:prstGeom>
-        </p:spPr>
-      </p:pic>
-    </p:spTree>
-    <p:extLst>
-      <p:ext uri="{BB962C8B-B14F-4D97-AF65-F5344CB8AC3E}">
-        <p14:creationId xmlns:p14="http://schemas.microsoft.com/office/powerpoint/2010/main" val="20242135"/>
-      </p:ext>
-    </p:extLst>
-  </p:cSld>
-  <p:clrMapOvr>
-    <a:masterClrMapping/>
-  </p:clrMapOvr>
-</p:sld>
-</file>
-
-<file path=ppt/slides/slide11.xml><?xml version="1.0" encoding="utf-8"?>
-<p:sld xmlns:a="http://schemas.openxmlformats.org/drawingml/2006/main" xmlns:r="http://schemas.openxmlformats.org/officeDocument/2006/relationships" xmlns:p="http://schemas.openxmlformats.org/presentationml/2006/main">
-  <p:cSld>
-    <p:spTree>
-      <p:nvGrpSpPr>
-        <p:cNvPr id="1" name=""/>
-        <p:cNvGrpSpPr/>
-        <p:nvPr/>
-      </p:nvGrpSpPr>
-      <p:grpSpPr>
-        <a:xfrm>
-          <a:off x="0" y="0"/>
-          <a:ext cx="0" cy="0"/>
-          <a:chOff x="0" y="0"/>
-          <a:chExt cx="0" cy="0"/>
-        </a:xfrm>
-      </p:grpSpPr>
-      <p:sp>
-        <p:nvSpPr>
-          <p:cNvPr id="4" name="テキスト ボックス 3">
-            <a:extLst>
-              <a:ext uri="{FF2B5EF4-FFF2-40B4-BE49-F238E27FC236}">
-                <a16:creationId xmlns:a16="http://schemas.microsoft.com/office/drawing/2014/main" id="{5A13BF46-B8C5-48AA-8308-C9ECFF431A18}"/>
-              </a:ext>
-            </a:extLst>
-          </p:cNvPr>
-          <p:cNvSpPr txBox="1"/>
-          <p:nvPr/>
-        </p:nvSpPr>
-        <p:spPr>
-          <a:xfrm>
-            <a:off x="567542" y="491954"/>
-            <a:ext cx="3467616" cy="584775"/>
-          </a:xfrm>
-          <a:prstGeom prst="rect">
-            <a:avLst/>
-          </a:prstGeom>
-          <a:noFill/>
-        </p:spPr>
-        <p:txBody>
-          <a:bodyPr wrap="none" rtlCol="0">
-            <a:spAutoFit/>
-          </a:bodyPr>
-          <a:lstStyle/>
-          <a:p>
-            <a:r>
-              <a:rPr lang="ja-JP" altLang="en-US" sz="3200" b="1" u="sng" dirty="0"/>
-              <a:t>カットと押し出し</a:t>
-            </a:r>
-            <a:endParaRPr kumimoji="1" lang="en-US" altLang="ja-JP" sz="3200" b="1" u="sng" dirty="0"/>
-          </a:p>
-        </p:txBody>
-      </p:sp>
-      <p:sp>
-        <p:nvSpPr>
-          <p:cNvPr id="6" name="テキスト ボックス 5">
-            <a:extLst>
-              <a:ext uri="{FF2B5EF4-FFF2-40B4-BE49-F238E27FC236}">
-                <a16:creationId xmlns:a16="http://schemas.microsoft.com/office/drawing/2014/main" id="{55830AD6-028B-4C4E-80BF-B70DFC1C3A46}"/>
-              </a:ext>
-            </a:extLst>
-          </p:cNvPr>
-          <p:cNvSpPr txBox="1"/>
-          <p:nvPr/>
-        </p:nvSpPr>
-        <p:spPr>
-          <a:xfrm>
-            <a:off x="567542" y="1216429"/>
             <a:ext cx="7879080" cy="461665"/>
           </a:xfrm>
           <a:prstGeom prst="rect">
@@ -4391,7 +4250,7 @@
         <p:spPr>
           <a:xfrm>
             <a:off x="567542" y="1216429"/>
-            <a:ext cx="8802410" cy="830997"/>
+            <a:ext cx="9110186" cy="1200329"/>
           </a:xfrm>
           <a:prstGeom prst="rect">
             <a:avLst/>
@@ -4404,36 +4263,116 @@
           </a:bodyPr>
           <a:lstStyle/>
           <a:p>
+            <a:r>
+              <a:rPr lang="ja-JP" altLang="en-US" sz="2400" dirty="0"/>
+              <a:t>ナイフは</a:t>
+            </a:r>
+            <a:r>
+              <a:rPr lang="ja-JP" altLang="en-US" sz="2400" b="1" dirty="0">
+                <a:solidFill>
+                  <a:srgbClr val="FF0000"/>
+                </a:solidFill>
+              </a:rPr>
+              <a:t>切り込みを入れる箇所をクリックで選択</a:t>
+            </a:r>
+            <a:r>
+              <a:rPr lang="ja-JP" altLang="en-US" sz="2400" dirty="0"/>
+              <a:t>していきます。</a:t>
+            </a:r>
+            <a:endParaRPr lang="en-US" altLang="ja-JP" sz="2400" dirty="0"/>
+          </a:p>
+          <a:p>
+            <a:r>
+              <a:rPr kumimoji="1" lang="ja-JP" altLang="en-US" sz="2400" dirty="0"/>
+              <a:t>切り込み線をつけたら</a:t>
+            </a:r>
+            <a:r>
+              <a:rPr kumimoji="1" lang="en-US" altLang="ja-JP" sz="2400" b="1" dirty="0">
+                <a:solidFill>
+                  <a:srgbClr val="FF0000"/>
+                </a:solidFill>
+              </a:rPr>
+              <a:t>Enter</a:t>
+            </a:r>
             <a:r>
               <a:rPr kumimoji="1" lang="ja-JP" altLang="en-US" sz="2400" b="1" dirty="0">
                 <a:solidFill>
                   <a:srgbClr val="FF0000"/>
                 </a:solidFill>
               </a:rPr>
-              <a:t>カット</a:t>
-            </a:r>
-            <a:r>
-              <a:rPr kumimoji="1" lang="ja-JP" altLang="en-US" sz="2400" dirty="0"/>
-              <a:t>とは</a:t>
-            </a:r>
-            <a:r>
-              <a:rPr kumimoji="1" lang="ja-JP" altLang="en-US" sz="2400" b="1" dirty="0">
+              <a:t>キー</a:t>
+            </a:r>
+            <a:r>
+              <a:rPr lang="ja-JP" altLang="en-US" sz="2400" b="1" dirty="0">
                 <a:solidFill>
                   <a:srgbClr val="FF0000"/>
                 </a:solidFill>
               </a:rPr>
-              <a:t>画像に切れ目を入れて、新しい辺を作る</a:t>
-            </a:r>
+              <a:t>で確定</a:t>
+            </a:r>
+            <a:r>
+              <a:rPr lang="ja-JP" altLang="en-US" sz="2400" dirty="0"/>
+              <a:t>します。</a:t>
+            </a:r>
+            <a:endParaRPr lang="en-US" altLang="ja-JP" sz="2400" dirty="0"/>
+          </a:p>
+          <a:p>
             <a:r>
               <a:rPr kumimoji="1" lang="ja-JP" altLang="en-US" sz="2400" dirty="0"/>
-              <a:t>ことです。</a:t>
+              <a:t>下のように縦に切れ込みを入れてみましょう。</a:t>
             </a:r>
             <a:endParaRPr kumimoji="1" lang="en-US" altLang="ja-JP" sz="2400" dirty="0"/>
           </a:p>
+        </p:txBody>
+      </p:sp>
+      <p:sp>
+        <p:nvSpPr>
+          <p:cNvPr id="8" name="テキスト ボックス 7">
+            <a:extLst>
+              <a:ext uri="{FF2B5EF4-FFF2-40B4-BE49-F238E27FC236}">
+                <a16:creationId xmlns:a16="http://schemas.microsoft.com/office/drawing/2014/main" id="{4FFAFBCE-35F3-4151-81AE-C14E792FB3E6}"/>
+              </a:ext>
+            </a:extLst>
+          </p:cNvPr>
+          <p:cNvSpPr txBox="1"/>
+          <p:nvPr/>
+        </p:nvSpPr>
+        <p:spPr>
+          <a:xfrm>
+            <a:off x="5122635" y="4946220"/>
+            <a:ext cx="5416868" cy="1200329"/>
+          </a:xfrm>
+          <a:prstGeom prst="rect">
+            <a:avLst/>
+          </a:prstGeom>
+          <a:noFill/>
+        </p:spPr>
+        <p:txBody>
+          <a:bodyPr wrap="none" rtlCol="0">
+            <a:spAutoFit/>
+          </a:bodyPr>
+          <a:lstStyle/>
+          <a:p>
+            <a:r>
+              <a:rPr lang="en-US" altLang="ja-JP" sz="2400" b="1" dirty="0">
+                <a:solidFill>
+                  <a:srgbClr val="00B050"/>
+                </a:solidFill>
+              </a:rPr>
+              <a:t>MEMO</a:t>
+            </a:r>
+          </a:p>
           <a:p>
             <a:r>
               <a:rPr lang="ja-JP" altLang="en-US" sz="2400" dirty="0"/>
-              <a:t>もっとも手軽な方法はナイフを使います。</a:t>
+              <a:t>後で位置調整はできるので、</a:t>
+            </a:r>
+            <a:endParaRPr lang="en-US" altLang="ja-JP" sz="2400" dirty="0"/>
+          </a:p>
+          <a:p>
+            <a:r>
+              <a:rPr kumimoji="1" lang="ja-JP" altLang="en-US" sz="2400" dirty="0"/>
+              <a:t>切れ込みの位置は適当で大丈夫です。</a:t>
             </a:r>
             <a:endParaRPr kumimoji="1" lang="en-US" altLang="ja-JP" sz="2400" dirty="0"/>
           </a:p>
@@ -4441,10 +4380,10 @@
       </p:sp>
       <p:pic>
         <p:nvPicPr>
-          <p:cNvPr id="3" name="図 2">
-            <a:extLst>
-              <a:ext uri="{FF2B5EF4-FFF2-40B4-BE49-F238E27FC236}">
-                <a16:creationId xmlns:a16="http://schemas.microsoft.com/office/drawing/2014/main" id="{C51E67FF-782F-45BE-B1CC-004E1290F8D0}"/>
+          <p:cNvPr id="10" name="図 9">
+            <a:extLst>
+              <a:ext uri="{FF2B5EF4-FFF2-40B4-BE49-F238E27FC236}">
+                <a16:creationId xmlns:a16="http://schemas.microsoft.com/office/drawing/2014/main" id="{3B02B026-2A78-4AAD-B2C7-8DBBF8F91CB9}"/>
               </a:ext>
             </a:extLst>
           </p:cNvPr>
@@ -4461,72 +4400,18 @@
         </p:blipFill>
         <p:spPr>
           <a:xfrm>
-            <a:off x="567541" y="2187125"/>
-            <a:ext cx="4115915" cy="3256941"/>
+            <a:off x="567542" y="2556458"/>
+            <a:ext cx="3699658" cy="3594703"/>
           </a:xfrm>
           <a:prstGeom prst="rect">
             <a:avLst/>
           </a:prstGeom>
         </p:spPr>
       </p:pic>
-      <p:sp>
-        <p:nvSpPr>
-          <p:cNvPr id="5" name="矢印: 右 4">
-            <a:extLst>
-              <a:ext uri="{FF2B5EF4-FFF2-40B4-BE49-F238E27FC236}">
-                <a16:creationId xmlns:a16="http://schemas.microsoft.com/office/drawing/2014/main" id="{E5A594D3-2197-4D10-8045-D8247A1DDAD0}"/>
-              </a:ext>
-            </a:extLst>
-          </p:cNvPr>
-          <p:cNvSpPr/>
-          <p:nvPr/>
-        </p:nvSpPr>
-        <p:spPr>
-          <a:xfrm rot="13654963">
-            <a:off x="1202266" y="4013201"/>
-            <a:ext cx="448734" cy="330200"/>
-          </a:xfrm>
-          <a:prstGeom prst="rightArrow">
-            <a:avLst/>
-          </a:prstGeom>
-          <a:solidFill>
-            <a:srgbClr val="FF0000"/>
-          </a:solidFill>
-          <a:ln>
-            <a:solidFill>
-              <a:schemeClr val="tx1"/>
-            </a:solidFill>
-          </a:ln>
-        </p:spPr>
-        <p:style>
-          <a:lnRef idx="2">
-            <a:schemeClr val="accent1">
-              <a:shade val="50000"/>
-            </a:schemeClr>
-          </a:lnRef>
-          <a:fillRef idx="1">
-            <a:schemeClr val="accent1"/>
-          </a:fillRef>
-          <a:effectRef idx="0">
-            <a:schemeClr val="accent1"/>
-          </a:effectRef>
-          <a:fontRef idx="minor">
-            <a:schemeClr val="lt1"/>
-          </a:fontRef>
-        </p:style>
-        <p:txBody>
-          <a:bodyPr rtlCol="0" anchor="ctr"/>
-          <a:lstStyle/>
-          <a:p>
-            <a:pPr algn="ctr"/>
-            <a:endParaRPr kumimoji="1" lang="ja-JP" altLang="en-US"/>
-          </a:p>
-        </p:txBody>
-      </p:sp>
     </p:spTree>
     <p:extLst>
       <p:ext uri="{BB962C8B-B14F-4D97-AF65-F5344CB8AC3E}">
-        <p14:creationId xmlns:p14="http://schemas.microsoft.com/office/powerpoint/2010/main" val="4283427928"/>
+        <p14:creationId xmlns:p14="http://schemas.microsoft.com/office/powerpoint/2010/main" val="1165128511"/>
       </p:ext>
     </p:extLst>
   </p:cSld>
@@ -4604,7 +4489,7 @@
         <p:spPr>
           <a:xfrm>
             <a:off x="567542" y="1216429"/>
-            <a:ext cx="9110186" cy="1200329"/>
+            <a:ext cx="9417963" cy="830997"/>
           </a:xfrm>
           <a:prstGeom prst="rect">
             <a:avLst/>
@@ -4617,116 +4502,36 @@
           </a:bodyPr>
           <a:lstStyle/>
           <a:p>
-            <a:r>
-              <a:rPr lang="ja-JP" altLang="en-US" sz="2400" dirty="0"/>
-              <a:t>ナイフは</a:t>
-            </a:r>
-            <a:r>
-              <a:rPr lang="ja-JP" altLang="en-US" sz="2400" b="1" dirty="0">
-                <a:solidFill>
-                  <a:srgbClr val="FF0000"/>
-                </a:solidFill>
-              </a:rPr>
-              <a:t>切り込みを入れる箇所をクリックで選択</a:t>
-            </a:r>
-            <a:r>
-              <a:rPr lang="ja-JP" altLang="en-US" sz="2400" dirty="0"/>
-              <a:t>していきます。</a:t>
-            </a:r>
-            <a:endParaRPr lang="en-US" altLang="ja-JP" sz="2400" dirty="0"/>
-          </a:p>
-          <a:p>
-            <a:r>
-              <a:rPr kumimoji="1" lang="ja-JP" altLang="en-US" sz="2400" dirty="0"/>
-              <a:t>切り込み線をつけたら</a:t>
-            </a:r>
-            <a:r>
-              <a:rPr kumimoji="1" lang="en-US" altLang="ja-JP" sz="2400" b="1" dirty="0">
-                <a:solidFill>
-                  <a:srgbClr val="FF0000"/>
-                </a:solidFill>
-              </a:rPr>
-              <a:t>Enter</a:t>
-            </a:r>
             <a:r>
               <a:rPr kumimoji="1" lang="ja-JP" altLang="en-US" sz="2400" b="1" dirty="0">
                 <a:solidFill>
                   <a:srgbClr val="FF0000"/>
                 </a:solidFill>
               </a:rPr>
-              <a:t>キー</a:t>
-            </a:r>
-            <a:r>
-              <a:rPr lang="ja-JP" altLang="en-US" sz="2400" b="1" dirty="0">
+              <a:t>押し出し</a:t>
+            </a:r>
+            <a:r>
+              <a:rPr kumimoji="1" lang="ja-JP" altLang="en-US" sz="2400" dirty="0"/>
+              <a:t>は、</a:t>
+            </a:r>
+            <a:r>
+              <a:rPr kumimoji="1" lang="ja-JP" altLang="en-US" sz="2400" b="1" dirty="0">
                 <a:solidFill>
                   <a:srgbClr val="FF0000"/>
                 </a:solidFill>
               </a:rPr>
-              <a:t>で確定</a:t>
-            </a:r>
-            <a:r>
-              <a:rPr lang="ja-JP" altLang="en-US" sz="2400" dirty="0"/>
+              <a:t>選択した面を押し出すように新たな面を作成</a:t>
+            </a:r>
+            <a:r>
+              <a:rPr kumimoji="1" lang="ja-JP" altLang="en-US" sz="2400" dirty="0"/>
               <a:t>します。</a:t>
             </a:r>
-            <a:endParaRPr lang="en-US" altLang="ja-JP" sz="2400" dirty="0"/>
+            <a:endParaRPr kumimoji="1" lang="en-US" altLang="ja-JP" sz="2400" dirty="0"/>
           </a:p>
           <a:p>
             <a:r>
               <a:rPr kumimoji="1" lang="ja-JP" altLang="en-US" sz="2400" dirty="0"/>
-              <a:t>下のように縦に切れ込みを入れてみましょう。</a:t>
-            </a:r>
-            <a:endParaRPr kumimoji="1" lang="en-US" altLang="ja-JP" sz="2400" dirty="0"/>
-          </a:p>
-        </p:txBody>
-      </p:sp>
-      <p:sp>
-        <p:nvSpPr>
-          <p:cNvPr id="8" name="テキスト ボックス 7">
-            <a:extLst>
-              <a:ext uri="{FF2B5EF4-FFF2-40B4-BE49-F238E27FC236}">
-                <a16:creationId xmlns:a16="http://schemas.microsoft.com/office/drawing/2014/main" id="{4FFAFBCE-35F3-4151-81AE-C14E792FB3E6}"/>
-              </a:ext>
-            </a:extLst>
-          </p:cNvPr>
-          <p:cNvSpPr txBox="1"/>
-          <p:nvPr/>
-        </p:nvSpPr>
-        <p:spPr>
-          <a:xfrm>
-            <a:off x="5122635" y="4946220"/>
-            <a:ext cx="5416868" cy="1200329"/>
-          </a:xfrm>
-          <a:prstGeom prst="rect">
-            <a:avLst/>
-          </a:prstGeom>
-          <a:noFill/>
-        </p:spPr>
-        <p:txBody>
-          <a:bodyPr wrap="none" rtlCol="0">
-            <a:spAutoFit/>
-          </a:bodyPr>
-          <a:lstStyle/>
-          <a:p>
-            <a:r>
-              <a:rPr lang="en-US" altLang="ja-JP" sz="2400" b="1" dirty="0">
-                <a:solidFill>
-                  <a:srgbClr val="00B050"/>
-                </a:solidFill>
-              </a:rPr>
-              <a:t>MEMO</a:t>
-            </a:r>
-          </a:p>
-          <a:p>
-            <a:r>
-              <a:rPr lang="ja-JP" altLang="en-US" sz="2400" dirty="0"/>
-              <a:t>後で位置調整はできるので、</a:t>
-            </a:r>
-            <a:endParaRPr lang="en-US" altLang="ja-JP" sz="2400" dirty="0"/>
-          </a:p>
-          <a:p>
-            <a:r>
-              <a:rPr kumimoji="1" lang="ja-JP" altLang="en-US" sz="2400" dirty="0"/>
-              <a:t>切れ込みの位置は適当で大丈夫です。</a:t>
+              <a:t>カットした面を選択して、押し出しボタンをクリックしましょう。</a:t>
             </a:r>
             <a:endParaRPr kumimoji="1" lang="en-US" altLang="ja-JP" sz="2400" dirty="0"/>
           </a:p>
@@ -4734,10 +4539,10 @@
       </p:sp>
       <p:pic>
         <p:nvPicPr>
-          <p:cNvPr id="10" name="図 9">
-            <a:extLst>
-              <a:ext uri="{FF2B5EF4-FFF2-40B4-BE49-F238E27FC236}">
-                <a16:creationId xmlns:a16="http://schemas.microsoft.com/office/drawing/2014/main" id="{3B02B026-2A78-4AAD-B2C7-8DBBF8F91CB9}"/>
+          <p:cNvPr id="3" name="図 2">
+            <a:extLst>
+              <a:ext uri="{FF2B5EF4-FFF2-40B4-BE49-F238E27FC236}">
+                <a16:creationId xmlns:a16="http://schemas.microsoft.com/office/drawing/2014/main" id="{DB625F63-F23D-46BD-9F4C-79BCDE19B2E3}"/>
               </a:ext>
             </a:extLst>
           </p:cNvPr>
@@ -4754,8 +4559,38 @@
         </p:blipFill>
         <p:spPr>
           <a:xfrm>
-            <a:off x="567542" y="2556458"/>
-            <a:ext cx="3699658" cy="3594703"/>
+            <a:off x="567541" y="2187125"/>
+            <a:ext cx="3189207" cy="3189207"/>
+          </a:xfrm>
+          <a:prstGeom prst="rect">
+            <a:avLst/>
+          </a:prstGeom>
+        </p:spPr>
+      </p:pic>
+      <p:pic>
+        <p:nvPicPr>
+          <p:cNvPr id="7" name="図 6">
+            <a:extLst>
+              <a:ext uri="{FF2B5EF4-FFF2-40B4-BE49-F238E27FC236}">
+                <a16:creationId xmlns:a16="http://schemas.microsoft.com/office/drawing/2014/main" id="{A0624288-42A2-4CB6-AF3D-D27D4B4AE253}"/>
+              </a:ext>
+            </a:extLst>
+          </p:cNvPr>
+          <p:cNvPicPr>
+            <a:picLocks noChangeAspect="1"/>
+          </p:cNvPicPr>
+          <p:nvPr/>
+        </p:nvPicPr>
+        <p:blipFill>
+          <a:blip r:embed="rId3"/>
+          <a:stretch>
+            <a:fillRect/>
+          </a:stretch>
+        </p:blipFill>
+        <p:spPr>
+          <a:xfrm>
+            <a:off x="4179989" y="2187125"/>
+            <a:ext cx="4107698" cy="3189207"/>
           </a:xfrm>
           <a:prstGeom prst="rect">
             <a:avLst/>
@@ -4765,7 +4600,7 @@
     </p:spTree>
     <p:extLst>
       <p:ext uri="{BB962C8B-B14F-4D97-AF65-F5344CB8AC3E}">
-        <p14:creationId xmlns:p14="http://schemas.microsoft.com/office/powerpoint/2010/main" val="1165128511"/>
+        <p14:creationId xmlns:p14="http://schemas.microsoft.com/office/powerpoint/2010/main" val="1964738301"/>
       </p:ext>
     </p:extLst>
   </p:cSld>
@@ -4843,7 +4678,7 @@
         <p:spPr>
           <a:xfrm>
             <a:off x="567542" y="1216429"/>
-            <a:ext cx="9417963" cy="830997"/>
+            <a:ext cx="9110186" cy="461665"/>
           </a:xfrm>
           <a:prstGeom prst="rect">
             <a:avLst/>
@@ -4857,35 +4692,8 @@
           <a:lstStyle/>
           <a:p>
             <a:r>
-              <a:rPr kumimoji="1" lang="ja-JP" altLang="en-US" sz="2400" b="1" dirty="0">
-                <a:solidFill>
-                  <a:srgbClr val="FF0000"/>
-                </a:solidFill>
-              </a:rPr>
-              <a:t>押し出し</a:t>
-            </a:r>
-            <a:r>
               <a:rPr kumimoji="1" lang="ja-JP" altLang="en-US" sz="2400" dirty="0"/>
-              <a:t>は、</a:t>
-            </a:r>
-            <a:r>
-              <a:rPr kumimoji="1" lang="ja-JP" altLang="en-US" sz="2400" b="1" dirty="0">
-                <a:solidFill>
-                  <a:srgbClr val="FF0000"/>
-                </a:solidFill>
-              </a:rPr>
-              <a:t>選択した面を押し出すように新たな面を作成</a:t>
-            </a:r>
-            <a:r>
-              <a:rPr kumimoji="1" lang="ja-JP" altLang="en-US" sz="2400" dirty="0"/>
-              <a:t>します。</a:t>
-            </a:r>
-            <a:endParaRPr kumimoji="1" lang="en-US" altLang="ja-JP" sz="2400" dirty="0"/>
-          </a:p>
-          <a:p>
-            <a:r>
-              <a:rPr kumimoji="1" lang="ja-JP" altLang="en-US" sz="2400" dirty="0"/>
-              <a:t>カットした面を選択して、押し出しボタンをクリックしましょう。</a:t>
+              <a:t>＋のつまみをドラッグ＆ドロップすると面を押し出しします。</a:t>
             </a:r>
             <a:endParaRPr kumimoji="1" lang="en-US" altLang="ja-JP" sz="2400" dirty="0"/>
           </a:p>
@@ -4893,10 +4701,10 @@
       </p:sp>
       <p:pic>
         <p:nvPicPr>
-          <p:cNvPr id="3" name="図 2">
-            <a:extLst>
-              <a:ext uri="{FF2B5EF4-FFF2-40B4-BE49-F238E27FC236}">
-                <a16:creationId xmlns:a16="http://schemas.microsoft.com/office/drawing/2014/main" id="{DB625F63-F23D-46BD-9F4C-79BCDE19B2E3}"/>
+          <p:cNvPr id="5" name="図 4">
+            <a:extLst>
+              <a:ext uri="{FF2B5EF4-FFF2-40B4-BE49-F238E27FC236}">
+                <a16:creationId xmlns:a16="http://schemas.microsoft.com/office/drawing/2014/main" id="{E2CAD21C-26E1-4C42-A13B-A350F13D1C57}"/>
               </a:ext>
             </a:extLst>
           </p:cNvPr>
@@ -4913,38 +4721,8 @@
         </p:blipFill>
         <p:spPr>
           <a:xfrm>
-            <a:off x="567541" y="2187125"/>
-            <a:ext cx="3189207" cy="3189207"/>
-          </a:xfrm>
-          <a:prstGeom prst="rect">
-            <a:avLst/>
-          </a:prstGeom>
-        </p:spPr>
-      </p:pic>
-      <p:pic>
-        <p:nvPicPr>
-          <p:cNvPr id="7" name="図 6">
-            <a:extLst>
-              <a:ext uri="{FF2B5EF4-FFF2-40B4-BE49-F238E27FC236}">
-                <a16:creationId xmlns:a16="http://schemas.microsoft.com/office/drawing/2014/main" id="{A0624288-42A2-4CB6-AF3D-D27D4B4AE253}"/>
-              </a:ext>
-            </a:extLst>
-          </p:cNvPr>
-          <p:cNvPicPr>
-            <a:picLocks noChangeAspect="1"/>
-          </p:cNvPicPr>
-          <p:nvPr/>
-        </p:nvPicPr>
-        <p:blipFill>
-          <a:blip r:embed="rId3"/>
-          <a:stretch>
-            <a:fillRect/>
-          </a:stretch>
-        </p:blipFill>
-        <p:spPr>
-          <a:xfrm>
-            <a:off x="4179989" y="2187125"/>
-            <a:ext cx="4107698" cy="3189207"/>
+            <a:off x="567542" y="1817795"/>
+            <a:ext cx="4512458" cy="4488956"/>
           </a:xfrm>
           <a:prstGeom prst="rect">
             <a:avLst/>
@@ -4954,7 +4732,7 @@
     </p:spTree>
     <p:extLst>
       <p:ext uri="{BB962C8B-B14F-4D97-AF65-F5344CB8AC3E}">
-        <p14:creationId xmlns:p14="http://schemas.microsoft.com/office/powerpoint/2010/main" val="1964738301"/>
+        <p14:creationId xmlns:p14="http://schemas.microsoft.com/office/powerpoint/2010/main" val="396666741"/>
       </p:ext>
     </p:extLst>
   </p:cSld>
@@ -5032,7 +4810,7 @@
         <p:spPr>
           <a:xfrm>
             <a:off x="567542" y="1216429"/>
-            <a:ext cx="9110186" cy="461665"/>
+            <a:ext cx="7263527" cy="461665"/>
           </a:xfrm>
           <a:prstGeom prst="rect">
             <a:avLst/>
@@ -5046,8 +4824,8 @@
           <a:lstStyle/>
           <a:p>
             <a:r>
-              <a:rPr kumimoji="1" lang="ja-JP" altLang="en-US" sz="2400" dirty="0"/>
-              <a:t>＋のつまみをドラッグ＆ドロップすると面を押し出しします。</a:t>
+              <a:rPr lang="ja-JP" altLang="en-US" sz="2400" dirty="0"/>
+              <a:t>自由にカットと押し出しを使って練習しましょう。</a:t>
             </a:r>
             <a:endParaRPr kumimoji="1" lang="en-US" altLang="ja-JP" sz="2400" dirty="0"/>
           </a:p>
@@ -5055,10 +4833,10 @@
       </p:sp>
       <p:pic>
         <p:nvPicPr>
-          <p:cNvPr id="5" name="図 4">
-            <a:extLst>
-              <a:ext uri="{FF2B5EF4-FFF2-40B4-BE49-F238E27FC236}">
-                <a16:creationId xmlns:a16="http://schemas.microsoft.com/office/drawing/2014/main" id="{E2CAD21C-26E1-4C42-A13B-A350F13D1C57}"/>
+          <p:cNvPr id="3" name="図 2">
+            <a:extLst>
+              <a:ext uri="{FF2B5EF4-FFF2-40B4-BE49-F238E27FC236}">
+                <a16:creationId xmlns:a16="http://schemas.microsoft.com/office/drawing/2014/main" id="{F8612DBD-A01A-4C6A-B145-1F2F2FDE0F4F}"/>
               </a:ext>
             </a:extLst>
           </p:cNvPr>
@@ -5076,7 +4854,7 @@
         <p:spPr>
           <a:xfrm>
             <a:off x="567542" y="1817795"/>
-            <a:ext cx="4512458" cy="4488956"/>
+            <a:ext cx="3030687" cy="4608406"/>
           </a:xfrm>
           <a:prstGeom prst="rect">
             <a:avLst/>
@@ -5086,7 +4864,7 @@
     </p:spTree>
     <p:extLst>
       <p:ext uri="{BB962C8B-B14F-4D97-AF65-F5344CB8AC3E}">
-        <p14:creationId xmlns:p14="http://schemas.microsoft.com/office/powerpoint/2010/main" val="396666741"/>
+        <p14:creationId xmlns:p14="http://schemas.microsoft.com/office/powerpoint/2010/main" val="2294513280"/>
       </p:ext>
     </p:extLst>
   </p:cSld>
@@ -5164,7 +4942,7 @@
         <p:spPr>
           <a:xfrm>
             <a:off x="567542" y="1216429"/>
-            <a:ext cx="7263527" cy="461665"/>
+            <a:ext cx="9725739" cy="461665"/>
           </a:xfrm>
           <a:prstGeom prst="rect">
             <a:avLst/>
@@ -5178,8 +4956,8 @@
           <a:lstStyle/>
           <a:p>
             <a:r>
-              <a:rPr lang="ja-JP" altLang="en-US" sz="2400" dirty="0"/>
-              <a:t>自由にカットと押し出しを使って練習しましょう。</a:t>
+              <a:rPr kumimoji="1" lang="ja-JP" altLang="en-US" sz="2400" dirty="0"/>
+              <a:t>ループカット機能を使えば、均等な幅でカットすることができます。</a:t>
             </a:r>
             <a:endParaRPr kumimoji="1" lang="en-US" altLang="ja-JP" sz="2400" dirty="0"/>
           </a:p>
@@ -5187,10 +4965,10 @@
       </p:sp>
       <p:pic>
         <p:nvPicPr>
-          <p:cNvPr id="3" name="図 2">
-            <a:extLst>
-              <a:ext uri="{FF2B5EF4-FFF2-40B4-BE49-F238E27FC236}">
-                <a16:creationId xmlns:a16="http://schemas.microsoft.com/office/drawing/2014/main" id="{F8612DBD-A01A-4C6A-B145-1F2F2FDE0F4F}"/>
+          <p:cNvPr id="5" name="図 4">
+            <a:extLst>
+              <a:ext uri="{FF2B5EF4-FFF2-40B4-BE49-F238E27FC236}">
+                <a16:creationId xmlns:a16="http://schemas.microsoft.com/office/drawing/2014/main" id="{98CF579D-CB20-4072-B2EB-5C647ED30383}"/>
               </a:ext>
             </a:extLst>
           </p:cNvPr>
@@ -5207,8 +4985,8 @@
         </p:blipFill>
         <p:spPr>
           <a:xfrm>
-            <a:off x="567542" y="1817795"/>
-            <a:ext cx="3030687" cy="4608406"/>
+            <a:off x="567542" y="1817794"/>
+            <a:ext cx="4884991" cy="4645027"/>
           </a:xfrm>
           <a:prstGeom prst="rect">
             <a:avLst/>
@@ -5218,7 +4996,7 @@
     </p:spTree>
     <p:extLst>
       <p:ext uri="{BB962C8B-B14F-4D97-AF65-F5344CB8AC3E}">
-        <p14:creationId xmlns:p14="http://schemas.microsoft.com/office/powerpoint/2010/main" val="2294513280"/>
+        <p14:creationId xmlns:p14="http://schemas.microsoft.com/office/powerpoint/2010/main" val="2243350574"/>
       </p:ext>
     </p:extLst>
   </p:cSld>
@@ -5296,7 +5074,7 @@
         <p:spPr>
           <a:xfrm>
             <a:off x="567542" y="1216429"/>
-            <a:ext cx="9725739" cy="461665"/>
+            <a:ext cx="10341293" cy="461665"/>
           </a:xfrm>
           <a:prstGeom prst="rect">
             <a:avLst/>
@@ -5311,7 +5089,7 @@
           <a:p>
             <a:r>
               <a:rPr kumimoji="1" lang="ja-JP" altLang="en-US" sz="2400" dirty="0"/>
-              <a:t>ループカット機能を使えば、均等な幅でカットすることができます。</a:t>
+              <a:t>ループカットボタンを選択して、マウスカーソルを辺に近づけましょう。</a:t>
             </a:r>
             <a:endParaRPr kumimoji="1" lang="en-US" altLang="ja-JP" sz="2400" dirty="0"/>
           </a:p>
@@ -5319,10 +5097,10 @@
       </p:sp>
       <p:pic>
         <p:nvPicPr>
-          <p:cNvPr id="5" name="図 4">
-            <a:extLst>
-              <a:ext uri="{FF2B5EF4-FFF2-40B4-BE49-F238E27FC236}">
-                <a16:creationId xmlns:a16="http://schemas.microsoft.com/office/drawing/2014/main" id="{98CF579D-CB20-4072-B2EB-5C647ED30383}"/>
+          <p:cNvPr id="3" name="図 2">
+            <a:extLst>
+              <a:ext uri="{FF2B5EF4-FFF2-40B4-BE49-F238E27FC236}">
+                <a16:creationId xmlns:a16="http://schemas.microsoft.com/office/drawing/2014/main" id="{0EAEA234-C649-4F47-8520-CC0BDA7B76B0}"/>
               </a:ext>
             </a:extLst>
           </p:cNvPr>
@@ -5340,7 +5118,37 @@
         <p:spPr>
           <a:xfrm>
             <a:off x="567542" y="1817794"/>
-            <a:ext cx="4884991" cy="4645027"/>
+            <a:ext cx="3223397" cy="3499273"/>
+          </a:xfrm>
+          <a:prstGeom prst="rect">
+            <a:avLst/>
+          </a:prstGeom>
+        </p:spPr>
+      </p:pic>
+      <p:pic>
+        <p:nvPicPr>
+          <p:cNvPr id="8" name="図 7">
+            <a:extLst>
+              <a:ext uri="{FF2B5EF4-FFF2-40B4-BE49-F238E27FC236}">
+                <a16:creationId xmlns:a16="http://schemas.microsoft.com/office/drawing/2014/main" id="{2ACA6EB5-BD46-4732-B8E3-B980291F3EE4}"/>
+              </a:ext>
+            </a:extLst>
+          </p:cNvPr>
+          <p:cNvPicPr>
+            <a:picLocks noChangeAspect="1"/>
+          </p:cNvPicPr>
+          <p:nvPr/>
+        </p:nvPicPr>
+        <p:blipFill>
+          <a:blip r:embed="rId3"/>
+          <a:stretch>
+            <a:fillRect/>
+          </a:stretch>
+        </p:blipFill>
+        <p:spPr>
+          <a:xfrm>
+            <a:off x="4477435" y="1817794"/>
+            <a:ext cx="3726765" cy="3501302"/>
           </a:xfrm>
           <a:prstGeom prst="rect">
             <a:avLst/>
@@ -5350,7 +5158,7 @@
     </p:spTree>
     <p:extLst>
       <p:ext uri="{BB962C8B-B14F-4D97-AF65-F5344CB8AC3E}">
-        <p14:creationId xmlns:p14="http://schemas.microsoft.com/office/powerpoint/2010/main" val="2243350574"/>
+        <p14:creationId xmlns:p14="http://schemas.microsoft.com/office/powerpoint/2010/main" val="1198423019"/>
       </p:ext>
     </p:extLst>
   </p:cSld>
@@ -5428,7 +5236,7 @@
         <p:spPr>
           <a:xfrm>
             <a:off x="567542" y="1216429"/>
-            <a:ext cx="10341293" cy="461665"/>
+            <a:ext cx="9281708" cy="461665"/>
           </a:xfrm>
           <a:prstGeom prst="rect">
             <a:avLst/>
@@ -5443,7 +5251,15 @@
           <a:p>
             <a:r>
               <a:rPr kumimoji="1" lang="ja-JP" altLang="en-US" sz="2400" dirty="0"/>
-              <a:t>ループカットボタンを選択して、マウスカーソルを辺に近づけましょう。</a:t>
+              <a:t>この状態でクリックすると、半分の位置で</a:t>
+            </a:r>
+            <a:r>
+              <a:rPr kumimoji="1" lang="en-US" altLang="ja-JP" sz="2400" dirty="0"/>
+              <a:t>1</a:t>
+            </a:r>
+            <a:r>
+              <a:rPr kumimoji="1" lang="ja-JP" altLang="en-US" sz="2400" dirty="0"/>
+              <a:t>周分カットされます。</a:t>
             </a:r>
             <a:endParaRPr kumimoji="1" lang="en-US" altLang="ja-JP" sz="2400" dirty="0"/>
           </a:p>
@@ -5451,10 +5267,10 @@
       </p:sp>
       <p:pic>
         <p:nvPicPr>
-          <p:cNvPr id="3" name="図 2">
-            <a:extLst>
-              <a:ext uri="{FF2B5EF4-FFF2-40B4-BE49-F238E27FC236}">
-                <a16:creationId xmlns:a16="http://schemas.microsoft.com/office/drawing/2014/main" id="{0EAEA234-C649-4F47-8520-CC0BDA7B76B0}"/>
+          <p:cNvPr id="5" name="図 4">
+            <a:extLst>
+              <a:ext uri="{FF2B5EF4-FFF2-40B4-BE49-F238E27FC236}">
+                <a16:creationId xmlns:a16="http://schemas.microsoft.com/office/drawing/2014/main" id="{8D07E54C-510A-414C-8B85-471398AF85E6}"/>
               </a:ext>
             </a:extLst>
           </p:cNvPr>
@@ -5471,38 +5287,8 @@
         </p:blipFill>
         <p:spPr>
           <a:xfrm>
-            <a:off x="567542" y="1817794"/>
-            <a:ext cx="3223397" cy="3499273"/>
-          </a:xfrm>
-          <a:prstGeom prst="rect">
-            <a:avLst/>
-          </a:prstGeom>
-        </p:spPr>
-      </p:pic>
-      <p:pic>
-        <p:nvPicPr>
-          <p:cNvPr id="8" name="図 7">
-            <a:extLst>
-              <a:ext uri="{FF2B5EF4-FFF2-40B4-BE49-F238E27FC236}">
-                <a16:creationId xmlns:a16="http://schemas.microsoft.com/office/drawing/2014/main" id="{2ACA6EB5-BD46-4732-B8E3-B980291F3EE4}"/>
-              </a:ext>
-            </a:extLst>
-          </p:cNvPr>
-          <p:cNvPicPr>
-            <a:picLocks noChangeAspect="1"/>
-          </p:cNvPicPr>
-          <p:nvPr/>
-        </p:nvPicPr>
-        <p:blipFill>
-          <a:blip r:embed="rId3"/>
-          <a:stretch>
-            <a:fillRect/>
-          </a:stretch>
-        </p:blipFill>
-        <p:spPr>
-          <a:xfrm>
-            <a:off x="4477435" y="1817794"/>
-            <a:ext cx="3726765" cy="3501302"/>
+            <a:off x="567542" y="1817795"/>
+            <a:ext cx="4668576" cy="4548252"/>
           </a:xfrm>
           <a:prstGeom prst="rect">
             <a:avLst/>
@@ -5512,7 +5298,7 @@
     </p:spTree>
     <p:extLst>
       <p:ext uri="{BB962C8B-B14F-4D97-AF65-F5344CB8AC3E}">
-        <p14:creationId xmlns:p14="http://schemas.microsoft.com/office/powerpoint/2010/main" val="1198423019"/>
+        <p14:creationId xmlns:p14="http://schemas.microsoft.com/office/powerpoint/2010/main" val="20242135"/>
       </p:ext>
     </p:extLst>
   </p:cSld>
